--- a/dataset/guides_final/SYS/manual/IT-SYS-006-M_공유 드라이브·파일 복구 처리 매뉴얼.pptx
+++ b/dataset/guides_final/SYS/manual/IT-SYS-006-M_공유 드라이브·파일 복구 처리 매뉴얼.pptx
@@ -22332,7 +22332,7 @@
                 <a:ea typeface="Malgun Gothic"/>
                 <a:cs typeface="Malgun Gothic"/>
               </a:rPr>
-              <a:t>티켓: 담당자 조치가 필요한 건. 담당팀에 배정하고 상태를 RDY → IP → FIN → CLS 으로 관리한다.</a:t>
+              <a:t>티켓: 담당자 조치가 필요한 건. 담당팀에 배정하고 상태를 RDY → WIP → FIN → CLS 으로 관리한다.</a:t>
             </a:r>
           </a:p>
         </p:txBody>

--- a/dataset/guides_final/SYS/manual/IT-SYS-006-M_공유 드라이브·파일 복구 처리 매뉴얼.pptx
+++ b/dataset/guides_final/SYS/manual/IT-SYS-006-M_공유 드라이브·파일 복구 처리 매뉴얼.pptx
@@ -3232,7 +3232,7 @@
                 <a:ea typeface="Malgun Gothic"/>
                 <a:cs typeface="Malgun Gothic"/>
               </a:rPr>
-              <a:t>한화시스템 ICT IT 담당자 매뉴얼 · 사내 시스템</a:t>
+              <a:t>가상 ICT 기업 IT 담당자 매뉴얼 · 사내 시스템</a:t>
             </a:r>
           </a:p>
         </p:txBody>
@@ -3511,7 +3511,7 @@
                 <a:ea typeface="Malgun Gothic"/>
                 <a:cs typeface="Malgun Gothic"/>
               </a:rPr>
-              <a:t>© HANWHA SYSTEMS ICT · IT-SYS-006-M · 사내 제한</a:t>
+              <a:t>© 가상 ICT 기업 · IT-SYS-006-M · 사내 제한</a:t>
             </a:r>
           </a:p>
         </p:txBody>
@@ -5939,7 +5939,7 @@
                 <a:ea typeface="Malgun Gothic"/>
                 <a:cs typeface="Malgun Gothic"/>
               </a:rPr>
-              <a:t>© HANWHA SYSTEMS ICT · IT-SYS-006-M · 사내 제한</a:t>
+              <a:t>© 가상 ICT 기업 · IT-SYS-006-M · 사내 제한</a:t>
             </a:r>
           </a:p>
         </p:txBody>
@@ -8649,7 +8649,7 @@
                 <a:ea typeface="Malgun Gothic"/>
                 <a:cs typeface="Malgun Gothic"/>
               </a:rPr>
-              <a:t>© HANWHA SYSTEMS ICT · IT-SYS-006-M · 사내 제한</a:t>
+              <a:t>© 가상 ICT 기업 · IT-SYS-006-M · 사내 제한</a:t>
             </a:r>
           </a:p>
         </p:txBody>
@@ -11453,7 +11453,7 @@
                 <a:ea typeface="Malgun Gothic"/>
                 <a:cs typeface="Malgun Gothic"/>
               </a:rPr>
-              <a:t>© HANWHA SYSTEMS ICT · IT-SYS-006-M · 사내 제한</a:t>
+              <a:t>© 가상 ICT 기업 · IT-SYS-006-M · 사내 제한</a:t>
             </a:r>
           </a:p>
         </p:txBody>
@@ -11701,7 +11701,7 @@
                 <a:ea typeface="Malgun Gothic"/>
                 <a:cs typeface="Malgun Gothic"/>
               </a:rPr>
-              <a:t>© HANWHA SYSTEMS ICT · IT-SYS-006-M · 사내 제한</a:t>
+              <a:t>© 가상 ICT 기업 · IT-SYS-006-M · 사내 제한</a:t>
             </a:r>
           </a:p>
         </p:txBody>
@@ -12360,7 +12360,7 @@
                 <a:ea typeface="Malgun Gothic"/>
                 <a:cs typeface="Malgun Gothic"/>
               </a:rPr>
-              <a:t>© HANWHA SYSTEMS ICT · IT-SYS-006-M · 사내 제한</a:t>
+              <a:t>© 가상 ICT 기업 · IT-SYS-006-M · 사내 제한</a:t>
             </a:r>
           </a:p>
         </p:txBody>
@@ -12608,7 +12608,7 @@
                 <a:ea typeface="Malgun Gothic"/>
                 <a:cs typeface="Malgun Gothic"/>
               </a:rPr>
-              <a:t>© HANWHA SYSTEMS ICT · IT-SYS-006-M · 사내 제한</a:t>
+              <a:t>© 가상 ICT 기업 · IT-SYS-006-M · 사내 제한</a:t>
             </a:r>
           </a:p>
         </p:txBody>
@@ -13636,7 +13636,7 @@
                 <a:ea typeface="Malgun Gothic"/>
                 <a:cs typeface="Malgun Gothic"/>
               </a:rPr>
-              <a:t>© HANWHA SYSTEMS ICT · IT-SYS-006-M · 사내 제한</a:t>
+              <a:t>© 가상 ICT 기업 · IT-SYS-006-M · 사내 제한</a:t>
             </a:r>
           </a:p>
         </p:txBody>
@@ -13884,7 +13884,7 @@
                 <a:ea typeface="Malgun Gothic"/>
                 <a:cs typeface="Malgun Gothic"/>
               </a:rPr>
-              <a:t>© HANWHA SYSTEMS ICT · IT-SYS-006-M · 사내 제한</a:t>
+              <a:t>© 가상 ICT 기업 · IT-SYS-006-M · 사내 제한</a:t>
             </a:r>
           </a:p>
         </p:txBody>
@@ -14576,7 +14576,7 @@
                 <a:ea typeface="Malgun Gothic"/>
                 <a:cs typeface="Malgun Gothic"/>
               </a:rPr>
-              <a:t>© HANWHA SYSTEMS ICT · IT-SYS-006-M · 사내 제한</a:t>
+              <a:t>© 가상 ICT 기업 · IT-SYS-006-M · 사내 제한</a:t>
             </a:r>
           </a:p>
         </p:txBody>
@@ -15553,7 +15553,7 @@
                 <a:ea typeface="Malgun Gothic"/>
                 <a:cs typeface="Malgun Gothic"/>
               </a:rPr>
-              <a:t>© HANWHA SYSTEMS ICT · IT-SYS-006-M · 사내 제한</a:t>
+              <a:t>© 가상 ICT 기업 · IT-SYS-006-M · 사내 제한</a:t>
             </a:r>
           </a:p>
         </p:txBody>
@@ -17196,7 +17196,7 @@
                 <a:ea typeface="Malgun Gothic"/>
                 <a:cs typeface="Malgun Gothic"/>
               </a:rPr>
-              <a:t>© HANWHA SYSTEMS ICT · IT-SYS-006-M · 사내 제한</a:t>
+              <a:t>© 가상 ICT 기업 · IT-SYS-006-M · 사내 제한</a:t>
             </a:r>
           </a:p>
         </p:txBody>
@@ -18342,7 +18342,7 @@
                 <a:ea typeface="Malgun Gothic"/>
                 <a:cs typeface="Malgun Gothic"/>
               </a:rPr>
-              <a:t>© HANWHA SYSTEMS ICT · IT-SYS-006-M · 사내 제한</a:t>
+              <a:t>© 가상 ICT 기업 · IT-SYS-006-M · 사내 제한</a:t>
             </a:r>
           </a:p>
         </p:txBody>
@@ -18590,7 +18590,7 @@
                 <a:ea typeface="Malgun Gothic"/>
                 <a:cs typeface="Malgun Gothic"/>
               </a:rPr>
-              <a:t>© HANWHA SYSTEMS ICT · IT-SYS-006-M · 사내 제한</a:t>
+              <a:t>© 가상 ICT 기업 · IT-SYS-006-M · 사내 제한</a:t>
             </a:r>
           </a:p>
         </p:txBody>
@@ -19600,7 +19600,7 @@
                 <a:ea typeface="Malgun Gothic"/>
                 <a:cs typeface="Malgun Gothic"/>
               </a:rPr>
-              <a:t>© HANWHA SYSTEMS ICT · IT-SYS-006-M · 사내 제한</a:t>
+              <a:t>© 가상 ICT 기업 · IT-SYS-006-M · 사내 제한</a:t>
             </a:r>
           </a:p>
         </p:txBody>
@@ -19848,7 +19848,7 @@
                 <a:ea typeface="Malgun Gothic"/>
                 <a:cs typeface="Malgun Gothic"/>
               </a:rPr>
-              <a:t>© HANWHA SYSTEMS ICT · IT-SYS-006-M · 사내 제한</a:t>
+              <a:t>© 가상 ICT 기업 · IT-SYS-006-M · 사내 제한</a:t>
             </a:r>
           </a:p>
         </p:txBody>
@@ -22708,7 +22708,7 @@
                 <a:ea typeface="Malgun Gothic"/>
                 <a:cs typeface="Malgun Gothic"/>
               </a:rPr>
-              <a:t>© HANWHA SYSTEMS ICT · IT-SYS-006-M · 사내 제한</a:t>
+              <a:t>© 가상 ICT 기업 · IT-SYS-006-M · 사내 제한</a:t>
             </a:r>
           </a:p>
         </p:txBody>
@@ -22956,7 +22956,7 @@
                 <a:ea typeface="Malgun Gothic"/>
                 <a:cs typeface="Malgun Gothic"/>
               </a:rPr>
-              <a:t>© HANWHA SYSTEMS ICT · IT-SYS-006-M · 사내 제한</a:t>
+              <a:t>© 가상 ICT 기업 · IT-SYS-006-M · 사내 제한</a:t>
             </a:r>
           </a:p>
         </p:txBody>
@@ -25760,7 +25760,7 @@
                 <a:ea typeface="Malgun Gothic"/>
                 <a:cs typeface="Malgun Gothic"/>
               </a:rPr>
-              <a:t>© HANWHA SYSTEMS ICT · IT-SYS-006-M · 사내 제한</a:t>
+              <a:t>© 가상 ICT 기업 · IT-SYS-006-M · 사내 제한</a:t>
             </a:r>
           </a:p>
         </p:txBody>
